--- a/curso_es/pptx/S72.pptx
+++ b/curso_es/pptx/S72.pptx
@@ -3822,7 +3822,7 @@
                 </a:solidFill>
                 <a:latin typeface="Fredoka"/>
               </a:rPr>
-              <a:t>Caso 1 · La ficha de Naiara</a:t>
+              <a:t>Caso 1 · Una ficha</a:t>
             </a:r>
           </a:p>
         </p:txBody>
@@ -3904,7 +3904,7 @@
                 </a:solidFill>
                 <a:latin typeface="Nunito Sans"/>
               </a:rPr>
-              <a:t>Naiara escribe en una ficha: «13 años. Bilbao. Toco la trikitixa. Me encanta leer. Soy tímida.» ¿Qué factores de su identidad aparecen? (Ejemplo inventado.)</a:t>
+              <a:t>Una chica escribe en una ficha: «13 años. Bilbao. Toco la trikitixa. Me encanta leer. Soy tímida.» ¿Qué factores de su identidad aparecen? (Ejemplo inventado.)</a:t>
             </a:r>
           </a:p>
         </p:txBody>
@@ -4027,7 +4027,7 @@
                 </a:solidFill>
                 <a:latin typeface="Nunito Sans"/>
               </a:rPr>
-              <a:t>Conclusión: cinco datos dan pistas sobre Naiara, pero ella es mucho más que su ficha.</a:t>
+              <a:t>Conclusión: cinco datos dan pistas sobre esa chica, pero ella es mucho más que su ficha.</a:t>
             </a:r>
           </a:p>
         </p:txBody>
@@ -4213,7 +4213,7 @@
                 </a:solidFill>
                 <a:latin typeface="Nunito Sans"/>
               </a:rPr>
-              <a:t>Iker suspende un examen de mates. Esa tarde dice: «Soy malo en mates. Yo soy así y no voy a cambiar».</a:t>
+              <a:t>Un chico suspende un examen de mates. Esa tarde dice: «Soy malo en mates. Yo soy así y no voy a cambiar».</a:t>
             </a:r>
           </a:p>
         </p:txBody>
@@ -4261,7 +4261,7 @@
                 </a:solidFill>
                 <a:latin typeface="Nunito Sans"/>
               </a:rPr>
-              <a:t>¿Cómo lo sabes? Iker solo tiene un examen.</a:t>
+              <a:t>¿Cómo lo sabes? Ese chico solo tiene un examen.</a:t>
             </a:r>
           </a:p>
           <a:p>
@@ -4458,7 +4458,7 @@
                 </a:solidFill>
                 <a:latin typeface="Fredoka"/>
               </a:rPr>
-              <a:t>Caso 3 · El gracioso de la clase</a:t>
+              <a:t>Caso 3 · El gracioso del equipo</a:t>
             </a:r>
           </a:p>
         </p:txBody>
@@ -4540,7 +4540,7 @@
                 </a:solidFill>
                 <a:latin typeface="Nunito Sans"/>
               </a:rPr>
-              <a:t>En clase todos llaman a Dylan «el gracioso». Un día llega serio y callado. Le dicen: «¿Qué te pasa? Tú no eres así».</a:t>
+              <a:t>En el equipo todos llaman a un chico «el gracioso». Un día llega serio y callado. Le dicen: «¿Qué te pasa? Tú no eres así».</a:t>
             </a:r>
           </a:p>
         </p:txBody>
@@ -4656,7 +4656,7 @@
                 </a:solidFill>
                 <a:latin typeface="Nunito Sans"/>
               </a:rPr>
-              <a:t>Dylan también puede estar triste, tener miedo o hablar en serio.</a:t>
+              <a:t>Ese chico también puede estar triste, tener miedo o hablar en serio.</a:t>
             </a:r>
           </a:p>
           <a:p>
@@ -4867,7 +4867,7 @@
                 </a:solidFill>
                 <a:latin typeface="Nunito Sans"/>
               </a:rPr>
-              <a:t>Leire dice: «Mi música favorita la he elegido yo, libremente. Nadie me ha influido».</a:t>
+              <a:t>Una chica dice: «Mi música favorita la he elegido yo, libremente. Nadie me ha influido».</a:t>
             </a:r>
           </a:p>
         </p:txBody>
